--- a/images/chap4/storage_schema.pptx
+++ b/images/chap4/storage_schema.pptx
@@ -3098,61 +3098,24 @@
       <p:grpSpPr/>
       <p:sp>
         <p:nvSpPr>
-          <p:cNvPr id="2" name="TextBox 1"/>
-          <p:cNvSpPr txBox="1"/>
+          <p:cNvPr id="2" name="Rectangle 1"/>
+          <p:cNvSpPr/>
           <p:nvPr/>
         </p:nvSpPr>
         <p:spPr>
           <a:xfrm>
-            <a:off x="621792" y="256032"/>
-            <a:ext cx="10972800" cy="411480"/>
+            <a:off x="164592" y="1371600"/>
+            <a:ext cx="2267712" cy="2377440"/>
           </a:xfrm>
           <a:prstGeom prst="rect">
             <a:avLst/>
-          </a:prstGeom>
-          <a:noFill/>
-        </p:spPr>
-        <p:txBody>
-          <a:bodyPr wrap="square" anchor="ctr">
-            <a:spAutoFit/>
-          </a:bodyPr>
-          <a:lstStyle/>
-          <a:p>
-            <a:pPr algn="ctr"/>
-            <a:r>
-              <a:rPr sz="1200" b="0">
-                <a:solidFill>
-                  <a:srgbClr val="1F2937"/>
-                </a:solidFill>
-                <a:latin typeface="Microsoft YaHei"/>
-              </a:rPr>
-              <a:t>核心实体与存储结构图</a:t>
-            </a:r>
-          </a:p>
-        </p:txBody>
-      </p:sp>
-      <p:sp>
-        <p:nvSpPr>
-          <p:cNvPr id="3" name="Rounded Rectangle 2"/>
-          <p:cNvSpPr/>
-          <p:nvPr/>
-        </p:nvSpPr>
-        <p:spPr>
-          <a:xfrm>
-            <a:off x="502920" y="749808"/>
-            <a:ext cx="11183112" cy="5532120"/>
-          </a:xfrm>
-          <a:prstGeom prst="roundRect">
-            <a:avLst>
-              <a:gd name="adj" fmla="val 2000"/>
-            </a:avLst>
           </a:prstGeom>
           <a:solidFill>
             <a:srgbClr val="FFFFFF"/>
           </a:solidFill>
           <a:ln w="12700">
             <a:solidFill>
-              <a:srgbClr val="D1D5DB"/>
+              <a:srgbClr val="7A7A7A"/>
             </a:solidFill>
           </a:ln>
         </p:spPr>
@@ -3178,30 +3141,1667 @@
           </a:p>
         </p:txBody>
       </p:sp>
-      <p:pic>
-        <p:nvPicPr>
-          <p:cNvPr id="4" name="Picture 3" descr="storage_schema.png"/>
-          <p:cNvPicPr>
-            <a:picLocks noChangeAspect="1"/>
-          </p:cNvPicPr>
+      <p:cxnSp>
+        <p:nvCxnSpPr>
+          <p:cNvPr id="3" name="Connector 2"/>
+          <p:cNvCxnSpPr/>
           <p:nvPr/>
-        </p:nvPicPr>
-        <p:blipFill>
-          <a:blip r:embed="rId2"/>
-          <a:stretch>
-            <a:fillRect/>
-          </a:stretch>
-        </p:blipFill>
-        <p:spPr>
-          <a:xfrm>
-            <a:off x="667511" y="2082983"/>
-            <a:ext cx="10853928" cy="2865769"/>
+        </p:nvCxnSpPr>
+        <p:spPr>
+          <a:xfrm>
+            <a:off x="164592" y="1792224"/>
+            <a:ext cx="2267712" cy="0"/>
+          </a:xfrm>
+          <a:prstGeom prst="line">
+            <a:avLst/>
+          </a:prstGeom>
+          <a:ln w="11430">
+            <a:solidFill>
+              <a:srgbClr val="B8B8B8"/>
+            </a:solidFill>
+          </a:ln>
+        </p:spPr>
+        <p:style>
+          <a:lnRef idx="2">
+            <a:schemeClr val="accent1"/>
+          </a:lnRef>
+          <a:fillRef idx="0">
+            <a:schemeClr val="accent1"/>
+          </a:fillRef>
+          <a:effectRef idx="1">
+            <a:schemeClr val="accent1"/>
+          </a:effectRef>
+          <a:fontRef idx="minor">
+            <a:schemeClr val="tx1"/>
+          </a:fontRef>
+        </p:style>
+      </p:cxnSp>
+      <p:cxnSp>
+        <p:nvCxnSpPr>
+          <p:cNvPr id="4" name="Connector 3"/>
+          <p:cNvCxnSpPr/>
+          <p:nvPr/>
+        </p:nvCxnSpPr>
+        <p:spPr>
+          <a:xfrm>
+            <a:off x="164592" y="2933395"/>
+            <a:ext cx="2267712" cy="0"/>
+          </a:xfrm>
+          <a:prstGeom prst="line">
+            <a:avLst/>
+          </a:prstGeom>
+          <a:ln w="11430">
+            <a:solidFill>
+              <a:srgbClr val="B8B8B8"/>
+            </a:solidFill>
+          </a:ln>
+        </p:spPr>
+        <p:style>
+          <a:lnRef idx="2">
+            <a:schemeClr val="accent1"/>
+          </a:lnRef>
+          <a:fillRef idx="0">
+            <a:schemeClr val="accent1"/>
+          </a:fillRef>
+          <a:effectRef idx="1">
+            <a:schemeClr val="accent1"/>
+          </a:effectRef>
+          <a:fontRef idx="minor">
+            <a:schemeClr val="tx1"/>
+          </a:fontRef>
+        </p:style>
+      </p:cxnSp>
+      <p:sp>
+        <p:nvSpPr>
+          <p:cNvPr id="5" name="TextBox 4"/>
+          <p:cNvSpPr txBox="1"/>
+          <p:nvPr/>
+        </p:nvSpPr>
+        <p:spPr>
+          <a:xfrm>
+            <a:off x="219456" y="1399032"/>
+            <a:ext cx="2157984" cy="384048"/>
           </a:xfrm>
           <a:prstGeom prst="rect">
             <a:avLst/>
           </a:prstGeom>
-        </p:spPr>
-      </p:pic>
+          <a:noFill/>
+        </p:spPr>
+        <p:txBody>
+          <a:bodyPr wrap="square" anchor="ctr" lIns="0" rIns="0" tIns="0" bIns="0">
+            <a:spAutoFit/>
+          </a:bodyPr>
+          <a:lstStyle/>
+          <a:p>
+            <a:pPr algn="ctr">
+              <a:spcBef>
+                <a:spcPts val="0"/>
+              </a:spcBef>
+              <a:spcAft>
+                <a:spcPts val="0"/>
+              </a:spcAft>
+            </a:pPr>
+            <a:r>
+              <a:rPr sz="1300" b="0" i="0">
+                <a:solidFill>
+                  <a:srgbClr val="1E1E1E"/>
+                </a:solidFill>
+                <a:latin typeface="Microsoft YaHei"/>
+              </a:rPr>
+              <a:t>CVE</a:t>
+            </a:r>
+          </a:p>
+        </p:txBody>
+      </p:sp>
+      <p:sp>
+        <p:nvSpPr>
+          <p:cNvPr id="6" name="TextBox 5"/>
+          <p:cNvSpPr txBox="1"/>
+          <p:nvPr/>
+        </p:nvSpPr>
+        <p:spPr>
+          <a:xfrm>
+            <a:off x="256032" y="1856231"/>
+            <a:ext cx="2084831" cy="1049731"/>
+          </a:xfrm>
+          <a:prstGeom prst="rect">
+            <a:avLst/>
+          </a:prstGeom>
+          <a:noFill/>
+        </p:spPr>
+        <p:txBody>
+          <a:bodyPr wrap="square" anchor="t" lIns="0" rIns="0" tIns="0" bIns="0">
+            <a:spAutoFit/>
+          </a:bodyPr>
+          <a:lstStyle/>
+          <a:p>
+            <a:pPr algn="l">
+              <a:spcBef>
+                <a:spcPts val="0"/>
+              </a:spcBef>
+              <a:spcAft>
+                <a:spcPts val="0"/>
+              </a:spcAft>
+            </a:pPr>
+            <a:r>
+              <a:rPr sz="1150" b="0" i="0">
+                <a:solidFill>
+                  <a:srgbClr val="1E1E1E"/>
+                </a:solidFill>
+                <a:latin typeface="Microsoft YaHei"/>
+              </a:rPr>
+              <a:t>- String cve_id
+- String summary
+- String description
+- Float cvss_score
+- String severity
+- Date published_date
+- Enum status</a:t>
+            </a:r>
+          </a:p>
+        </p:txBody>
+      </p:sp>
+      <p:sp>
+        <p:nvSpPr>
+          <p:cNvPr id="7" name="TextBox 6"/>
+          <p:cNvSpPr txBox="1"/>
+          <p:nvPr/>
+        </p:nvSpPr>
+        <p:spPr>
+          <a:xfrm>
+            <a:off x="256032" y="2997403"/>
+            <a:ext cx="2084831" cy="724204"/>
+          </a:xfrm>
+          <a:prstGeom prst="rect">
+            <a:avLst/>
+          </a:prstGeom>
+          <a:noFill/>
+        </p:spPr>
+        <p:txBody>
+          <a:bodyPr wrap="square" anchor="t" lIns="0" rIns="0" tIns="0" bIns="0">
+            <a:spAutoFit/>
+          </a:bodyPr>
+          <a:lstStyle/>
+          <a:p>
+            <a:pPr algn="l">
+              <a:spcBef>
+                <a:spcPts val="0"/>
+              </a:spcBef>
+              <a:spcAft>
+                <a:spcPts val="0"/>
+              </a:spcAft>
+            </a:pPr>
+            <a:r>
+              <a:rPr sz="1150" b="0" i="0">
+                <a:solidFill>
+                  <a:srgbClr val="1E1E1E"/>
+                </a:solidFill>
+                <a:latin typeface="Microsoft YaHei"/>
+              </a:rPr>
+              <a:t>+ getSeverityLevel(): String
++ toFeatureVector(): List</a:t>
+            </a:r>
+          </a:p>
+        </p:txBody>
+      </p:sp>
+      <p:sp>
+        <p:nvSpPr>
+          <p:cNvPr id="8" name="Rectangle 7"/>
+          <p:cNvSpPr/>
+          <p:nvPr/>
+        </p:nvSpPr>
+        <p:spPr>
+          <a:xfrm>
+            <a:off x="3246120" y="1572768"/>
+            <a:ext cx="2761488" cy="2176272"/>
+          </a:xfrm>
+          <a:prstGeom prst="rect">
+            <a:avLst/>
+          </a:prstGeom>
+          <a:solidFill>
+            <a:srgbClr val="FFFFFF"/>
+          </a:solidFill>
+          <a:ln w="12700">
+            <a:solidFill>
+              <a:srgbClr val="7A7A7A"/>
+            </a:solidFill>
+          </a:ln>
+        </p:spPr>
+        <p:style>
+          <a:lnRef idx="1">
+            <a:schemeClr val="accent1"/>
+          </a:lnRef>
+          <a:fillRef idx="3">
+            <a:schemeClr val="accent1"/>
+          </a:fillRef>
+          <a:effectRef idx="2">
+            <a:schemeClr val="accent1"/>
+          </a:effectRef>
+          <a:fontRef idx="minor">
+            <a:schemeClr val="lt1"/>
+          </a:fontRef>
+        </p:style>
+        <p:txBody>
+          <a:bodyPr rtlCol="0" anchor="ctr"/>
+          <a:lstStyle/>
+          <a:p>
+            <a:pPr algn="ctr"/>
+          </a:p>
+        </p:txBody>
+      </p:sp>
+      <p:cxnSp>
+        <p:nvCxnSpPr>
+          <p:cNvPr id="9" name="Connector 8"/>
+          <p:cNvCxnSpPr/>
+          <p:nvPr/>
+        </p:nvCxnSpPr>
+        <p:spPr>
+          <a:xfrm>
+            <a:off x="3246120" y="1993392"/>
+            <a:ext cx="2761488" cy="0"/>
+          </a:xfrm>
+          <a:prstGeom prst="line">
+            <a:avLst/>
+          </a:prstGeom>
+          <a:ln w="11430">
+            <a:solidFill>
+              <a:srgbClr val="B8B8B8"/>
+            </a:solidFill>
+          </a:ln>
+        </p:spPr>
+        <p:style>
+          <a:lnRef idx="2">
+            <a:schemeClr val="accent1"/>
+          </a:lnRef>
+          <a:fillRef idx="0">
+            <a:schemeClr val="accent1"/>
+          </a:fillRef>
+          <a:effectRef idx="1">
+            <a:schemeClr val="accent1"/>
+          </a:effectRef>
+          <a:fontRef idx="minor">
+            <a:schemeClr val="tx1"/>
+          </a:fontRef>
+        </p:style>
+      </p:cxnSp>
+      <p:cxnSp>
+        <p:nvCxnSpPr>
+          <p:cNvPr id="10" name="Connector 9"/>
+          <p:cNvCxnSpPr/>
+          <p:nvPr/>
+        </p:nvCxnSpPr>
+        <p:spPr>
+          <a:xfrm>
+            <a:off x="3246120" y="3038002"/>
+            <a:ext cx="2761488" cy="0"/>
+          </a:xfrm>
+          <a:prstGeom prst="line">
+            <a:avLst/>
+          </a:prstGeom>
+          <a:ln w="11430">
+            <a:solidFill>
+              <a:srgbClr val="B8B8B8"/>
+            </a:solidFill>
+          </a:ln>
+        </p:spPr>
+        <p:style>
+          <a:lnRef idx="2">
+            <a:schemeClr val="accent1"/>
+          </a:lnRef>
+          <a:fillRef idx="0">
+            <a:schemeClr val="accent1"/>
+          </a:fillRef>
+          <a:effectRef idx="1">
+            <a:schemeClr val="accent1"/>
+          </a:effectRef>
+          <a:fontRef idx="minor">
+            <a:schemeClr val="tx1"/>
+          </a:fontRef>
+        </p:style>
+      </p:cxnSp>
+      <p:sp>
+        <p:nvSpPr>
+          <p:cNvPr id="11" name="TextBox 10"/>
+          <p:cNvSpPr txBox="1"/>
+          <p:nvPr/>
+        </p:nvSpPr>
+        <p:spPr>
+          <a:xfrm>
+            <a:off x="3300984" y="1600200"/>
+            <a:ext cx="2651760" cy="384048"/>
+          </a:xfrm>
+          <a:prstGeom prst="rect">
+            <a:avLst/>
+          </a:prstGeom>
+          <a:noFill/>
+        </p:spPr>
+        <p:txBody>
+          <a:bodyPr wrap="square" anchor="ctr" lIns="0" rIns="0" tIns="0" bIns="0">
+            <a:spAutoFit/>
+          </a:bodyPr>
+          <a:lstStyle/>
+          <a:p>
+            <a:pPr algn="ctr">
+              <a:spcBef>
+                <a:spcPts val="0"/>
+              </a:spcBef>
+              <a:spcAft>
+                <a:spcPts val="0"/>
+              </a:spcAft>
+            </a:pPr>
+            <a:r>
+              <a:rPr sz="1300" b="0" i="0">
+                <a:solidFill>
+                  <a:srgbClr val="1E1E1E"/>
+                </a:solidFill>
+                <a:latin typeface="Microsoft YaHei"/>
+              </a:rPr>
+              <a:t>Session</a:t>
+            </a:r>
+          </a:p>
+        </p:txBody>
+      </p:sp>
+      <p:sp>
+        <p:nvSpPr>
+          <p:cNvPr id="12" name="TextBox 11"/>
+          <p:cNvSpPr txBox="1"/>
+          <p:nvPr/>
+        </p:nvSpPr>
+        <p:spPr>
+          <a:xfrm>
+            <a:off x="3337560" y="2057400"/>
+            <a:ext cx="2578608" cy="953170"/>
+          </a:xfrm>
+          <a:prstGeom prst="rect">
+            <a:avLst/>
+          </a:prstGeom>
+          <a:noFill/>
+        </p:spPr>
+        <p:txBody>
+          <a:bodyPr wrap="square" anchor="t" lIns="0" rIns="0" tIns="0" bIns="0">
+            <a:spAutoFit/>
+          </a:bodyPr>
+          <a:lstStyle/>
+          <a:p>
+            <a:pPr algn="l">
+              <a:spcBef>
+                <a:spcPts val="0"/>
+              </a:spcBef>
+              <a:spcAft>
+                <a:spcPts val="0"/>
+              </a:spcAft>
+            </a:pPr>
+            <a:r>
+              <a:rPr sz="1150" b="0" i="0">
+                <a:solidFill>
+                  <a:srgbClr val="1E1E1E"/>
+                </a:solidFill>
+                <a:latin typeface="Microsoft YaHei"/>
+              </a:rPr>
+              <a:t>- String session_id
+- String model_name
+- String prompt_template
+- DateTime created_at
+- Enum status</a:t>
+            </a:r>
+          </a:p>
+        </p:txBody>
+      </p:sp>
+      <p:sp>
+        <p:nvSpPr>
+          <p:cNvPr id="13" name="TextBox 12"/>
+          <p:cNvSpPr txBox="1"/>
+          <p:nvPr/>
+        </p:nvSpPr>
+        <p:spPr>
+          <a:xfrm>
+            <a:off x="3337560" y="3102010"/>
+            <a:ext cx="2578608" cy="619597"/>
+          </a:xfrm>
+          <a:prstGeom prst="rect">
+            <a:avLst/>
+          </a:prstGeom>
+          <a:noFill/>
+        </p:spPr>
+        <p:txBody>
+          <a:bodyPr wrap="square" anchor="t" lIns="0" rIns="0" tIns="0" bIns="0">
+            <a:spAutoFit/>
+          </a:bodyPr>
+          <a:lstStyle/>
+          <a:p>
+            <a:pPr algn="l">
+              <a:spcBef>
+                <a:spcPts val="0"/>
+              </a:spcBef>
+              <a:spcAft>
+                <a:spcPts val="0"/>
+              </a:spcAft>
+            </a:pPr>
+            <a:r>
+              <a:rPr sz="1150" b="0" i="0">
+                <a:solidFill>
+                  <a:srgbClr val="1E1E1E"/>
+                </a:solidFill>
+                <a:latin typeface="Microsoft YaHei"/>
+              </a:rPr>
+              <a:t>+ initWorkspace(): void
++ getLatestStrategy(): Strategy</a:t>
+            </a:r>
+          </a:p>
+        </p:txBody>
+      </p:sp>
+      <p:sp>
+        <p:nvSpPr>
+          <p:cNvPr id="14" name="Rectangle 13"/>
+          <p:cNvSpPr/>
+          <p:nvPr/>
+        </p:nvSpPr>
+        <p:spPr>
+          <a:xfrm>
+            <a:off x="6601968" y="1874519"/>
+            <a:ext cx="2176272" cy="1883664"/>
+          </a:xfrm>
+          <a:prstGeom prst="rect">
+            <a:avLst/>
+          </a:prstGeom>
+          <a:solidFill>
+            <a:srgbClr val="FFFFFF"/>
+          </a:solidFill>
+          <a:ln w="12700">
+            <a:solidFill>
+              <a:srgbClr val="7A7A7A"/>
+            </a:solidFill>
+          </a:ln>
+        </p:spPr>
+        <p:style>
+          <a:lnRef idx="1">
+            <a:schemeClr val="accent1"/>
+          </a:lnRef>
+          <a:fillRef idx="3">
+            <a:schemeClr val="accent1"/>
+          </a:fillRef>
+          <a:effectRef idx="2">
+            <a:schemeClr val="accent1"/>
+          </a:effectRef>
+          <a:fontRef idx="minor">
+            <a:schemeClr val="lt1"/>
+          </a:fontRef>
+        </p:style>
+        <p:txBody>
+          <a:bodyPr rtlCol="0" anchor="ctr"/>
+          <a:lstStyle/>
+          <a:p>
+            <a:pPr algn="ctr"/>
+          </a:p>
+        </p:txBody>
+      </p:sp>
+      <p:cxnSp>
+        <p:nvCxnSpPr>
+          <p:cNvPr id="15" name="Connector 14"/>
+          <p:cNvCxnSpPr/>
+          <p:nvPr/>
+        </p:nvCxnSpPr>
+        <p:spPr>
+          <a:xfrm>
+            <a:off x="6601968" y="2295144"/>
+            <a:ext cx="2176272" cy="0"/>
+          </a:xfrm>
+          <a:prstGeom prst="line">
+            <a:avLst/>
+          </a:prstGeom>
+          <a:ln w="11430">
+            <a:solidFill>
+              <a:srgbClr val="B8B8B8"/>
+            </a:solidFill>
+          </a:ln>
+        </p:spPr>
+        <p:style>
+          <a:lnRef idx="2">
+            <a:schemeClr val="accent1"/>
+          </a:lnRef>
+          <a:fillRef idx="0">
+            <a:schemeClr val="accent1"/>
+          </a:fillRef>
+          <a:effectRef idx="1">
+            <a:schemeClr val="accent1"/>
+          </a:effectRef>
+          <a:fontRef idx="minor">
+            <a:schemeClr val="tx1"/>
+          </a:fontRef>
+        </p:style>
+      </p:cxnSp>
+      <p:cxnSp>
+        <p:nvCxnSpPr>
+          <p:cNvPr id="16" name="Connector 15"/>
+          <p:cNvCxnSpPr/>
+          <p:nvPr/>
+        </p:nvCxnSpPr>
+        <p:spPr>
+          <a:xfrm>
+            <a:off x="6601968" y="3199302"/>
+            <a:ext cx="2176272" cy="0"/>
+          </a:xfrm>
+          <a:prstGeom prst="line">
+            <a:avLst/>
+          </a:prstGeom>
+          <a:ln w="11430">
+            <a:solidFill>
+              <a:srgbClr val="B8B8B8"/>
+            </a:solidFill>
+          </a:ln>
+        </p:spPr>
+        <p:style>
+          <a:lnRef idx="2">
+            <a:schemeClr val="accent1"/>
+          </a:lnRef>
+          <a:fillRef idx="0">
+            <a:schemeClr val="accent1"/>
+          </a:fillRef>
+          <a:effectRef idx="1">
+            <a:schemeClr val="accent1"/>
+          </a:effectRef>
+          <a:fontRef idx="minor">
+            <a:schemeClr val="tx1"/>
+          </a:fontRef>
+        </p:style>
+      </p:cxnSp>
+      <p:sp>
+        <p:nvSpPr>
+          <p:cNvPr id="17" name="TextBox 16"/>
+          <p:cNvSpPr txBox="1"/>
+          <p:nvPr/>
+        </p:nvSpPr>
+        <p:spPr>
+          <a:xfrm>
+            <a:off x="6656831" y="1901951"/>
+            <a:ext cx="2066543" cy="384048"/>
+          </a:xfrm>
+          <a:prstGeom prst="rect">
+            <a:avLst/>
+          </a:prstGeom>
+          <a:noFill/>
+        </p:spPr>
+        <p:txBody>
+          <a:bodyPr wrap="square" anchor="ctr" lIns="0" rIns="0" tIns="0" bIns="0">
+            <a:spAutoFit/>
+          </a:bodyPr>
+          <a:lstStyle/>
+          <a:p>
+            <a:pPr algn="ctr">
+              <a:spcBef>
+                <a:spcPts val="0"/>
+              </a:spcBef>
+              <a:spcAft>
+                <a:spcPts val="0"/>
+              </a:spcAft>
+            </a:pPr>
+            <a:r>
+              <a:rPr sz="1300" b="0" i="0">
+                <a:solidFill>
+                  <a:srgbClr val="1E1E1E"/>
+                </a:solidFill>
+                <a:latin typeface="Microsoft YaHei"/>
+              </a:rPr>
+              <a:t>Strategy</a:t>
+            </a:r>
+          </a:p>
+        </p:txBody>
+      </p:sp>
+      <p:sp>
+        <p:nvSpPr>
+          <p:cNvPr id="18" name="TextBox 17"/>
+          <p:cNvSpPr txBox="1"/>
+          <p:nvPr/>
+        </p:nvSpPr>
+        <p:spPr>
+          <a:xfrm>
+            <a:off x="6693407" y="2359151"/>
+            <a:ext cx="1993391" cy="812718"/>
+          </a:xfrm>
+          <a:prstGeom prst="rect">
+            <a:avLst/>
+          </a:prstGeom>
+          <a:noFill/>
+        </p:spPr>
+        <p:txBody>
+          <a:bodyPr wrap="square" anchor="t" lIns="0" rIns="0" tIns="0" bIns="0">
+            <a:spAutoFit/>
+          </a:bodyPr>
+          <a:lstStyle/>
+          <a:p>
+            <a:pPr algn="l">
+              <a:spcBef>
+                <a:spcPts val="0"/>
+              </a:spcBef>
+              <a:spcAft>
+                <a:spcPts val="0"/>
+              </a:spcAft>
+            </a:pPr>
+            <a:r>
+              <a:rPr sz="1150" b="0" i="0">
+                <a:solidFill>
+                  <a:srgbClr val="1E1E1E"/>
+                </a:solidFill>
+                <a:latin typeface="Microsoft YaHei"/>
+              </a:rPr>
+              <a:t>- String strategy_id
+- String content
+- String reasoning_chain
+- List&lt;String&gt; rag_snippets
+- Int version
+- DateTime generated_at</a:t>
+            </a:r>
+          </a:p>
+        </p:txBody>
+      </p:sp>
+      <p:sp>
+        <p:nvSpPr>
+          <p:cNvPr id="19" name="TextBox 18"/>
+          <p:cNvSpPr txBox="1"/>
+          <p:nvPr/>
+        </p:nvSpPr>
+        <p:spPr>
+          <a:xfrm>
+            <a:off x="6693407" y="3263310"/>
+            <a:ext cx="1993391" cy="467441"/>
+          </a:xfrm>
+          <a:prstGeom prst="rect">
+            <a:avLst/>
+          </a:prstGeom>
+          <a:noFill/>
+        </p:spPr>
+        <p:txBody>
+          <a:bodyPr wrap="square" anchor="t" lIns="0" rIns="0" tIns="0" bIns="0">
+            <a:spAutoFit/>
+          </a:bodyPr>
+          <a:lstStyle/>
+          <a:p>
+            <a:pPr algn="l">
+              <a:spcBef>
+                <a:spcPts val="0"/>
+              </a:spcBef>
+              <a:spcAft>
+                <a:spcPts val="0"/>
+              </a:spcAft>
+            </a:pPr>
+            <a:r>
+              <a:rPr sz="1150" b="0" i="0">
+                <a:solidFill>
+                  <a:srgbClr val="1E1E1E"/>
+                </a:solidFill>
+                <a:latin typeface="Microsoft YaHei"/>
+              </a:rPr>
+              <a:t>+ render(): String
++ diff(other): String</a:t>
+            </a:r>
+          </a:p>
+        </p:txBody>
+      </p:sp>
+      <p:sp>
+        <p:nvSpPr>
+          <p:cNvPr id="20" name="Rectangle 19"/>
+          <p:cNvSpPr/>
+          <p:nvPr/>
+        </p:nvSpPr>
+        <p:spPr>
+          <a:xfrm>
+            <a:off x="9628632" y="1426464"/>
+            <a:ext cx="2286000" cy="2286000"/>
+          </a:xfrm>
+          <a:prstGeom prst="rect">
+            <a:avLst/>
+          </a:prstGeom>
+          <a:solidFill>
+            <a:srgbClr val="FFFFFF"/>
+          </a:solidFill>
+          <a:ln w="12700">
+            <a:solidFill>
+              <a:srgbClr val="7A7A7A"/>
+            </a:solidFill>
+          </a:ln>
+        </p:spPr>
+        <p:style>
+          <a:lnRef idx="1">
+            <a:schemeClr val="accent1"/>
+          </a:lnRef>
+          <a:fillRef idx="3">
+            <a:schemeClr val="accent1"/>
+          </a:fillRef>
+          <a:effectRef idx="2">
+            <a:schemeClr val="accent1"/>
+          </a:effectRef>
+          <a:fontRef idx="minor">
+            <a:schemeClr val="lt1"/>
+          </a:fontRef>
+        </p:style>
+        <p:txBody>
+          <a:bodyPr rtlCol="0" anchor="ctr"/>
+          <a:lstStyle/>
+          <a:p>
+            <a:pPr algn="ctr"/>
+          </a:p>
+        </p:txBody>
+      </p:sp>
+      <p:cxnSp>
+        <p:nvCxnSpPr>
+          <p:cNvPr id="21" name="Connector 20"/>
+          <p:cNvCxnSpPr/>
+          <p:nvPr/>
+        </p:nvCxnSpPr>
+        <p:spPr>
+          <a:xfrm>
+            <a:off x="9628632" y="1847088"/>
+            <a:ext cx="2286000" cy="0"/>
+          </a:xfrm>
+          <a:prstGeom prst="line">
+            <a:avLst/>
+          </a:prstGeom>
+          <a:ln w="11430">
+            <a:solidFill>
+              <a:srgbClr val="B8B8B8"/>
+            </a:solidFill>
+          </a:ln>
+        </p:spPr>
+        <p:style>
+          <a:lnRef idx="2">
+            <a:schemeClr val="accent1"/>
+          </a:lnRef>
+          <a:fillRef idx="0">
+            <a:schemeClr val="accent1"/>
+          </a:fillRef>
+          <a:effectRef idx="1">
+            <a:schemeClr val="accent1"/>
+          </a:effectRef>
+          <a:fontRef idx="minor">
+            <a:schemeClr val="tx1"/>
+          </a:fontRef>
+        </p:style>
+      </p:cxnSp>
+      <p:cxnSp>
+        <p:nvCxnSpPr>
+          <p:cNvPr id="22" name="Connector 21"/>
+          <p:cNvCxnSpPr/>
+          <p:nvPr/>
+        </p:nvCxnSpPr>
+        <p:spPr>
+          <a:xfrm>
+            <a:off x="9628632" y="2944368"/>
+            <a:ext cx="2286000" cy="0"/>
+          </a:xfrm>
+          <a:prstGeom prst="line">
+            <a:avLst/>
+          </a:prstGeom>
+          <a:ln w="11430">
+            <a:solidFill>
+              <a:srgbClr val="B8B8B8"/>
+            </a:solidFill>
+          </a:ln>
+        </p:spPr>
+        <p:style>
+          <a:lnRef idx="2">
+            <a:schemeClr val="accent1"/>
+          </a:lnRef>
+          <a:fillRef idx="0">
+            <a:schemeClr val="accent1"/>
+          </a:fillRef>
+          <a:effectRef idx="1">
+            <a:schemeClr val="accent1"/>
+          </a:effectRef>
+          <a:fontRef idx="minor">
+            <a:schemeClr val="tx1"/>
+          </a:fontRef>
+        </p:style>
+      </p:cxnSp>
+      <p:sp>
+        <p:nvSpPr>
+          <p:cNvPr id="23" name="TextBox 22"/>
+          <p:cNvSpPr txBox="1"/>
+          <p:nvPr/>
+        </p:nvSpPr>
+        <p:spPr>
+          <a:xfrm>
+            <a:off x="9683496" y="1453896"/>
+            <a:ext cx="2176272" cy="384048"/>
+          </a:xfrm>
+          <a:prstGeom prst="rect">
+            <a:avLst/>
+          </a:prstGeom>
+          <a:noFill/>
+        </p:spPr>
+        <p:txBody>
+          <a:bodyPr wrap="square" anchor="ctr" lIns="0" rIns="0" tIns="0" bIns="0">
+            <a:spAutoFit/>
+          </a:bodyPr>
+          <a:lstStyle/>
+          <a:p>
+            <a:pPr algn="ctr">
+              <a:spcBef>
+                <a:spcPts val="0"/>
+              </a:spcBef>
+              <a:spcAft>
+                <a:spcPts val="0"/>
+              </a:spcAft>
+            </a:pPr>
+            <a:r>
+              <a:rPr sz="1300" b="0" i="0">
+                <a:solidFill>
+                  <a:srgbClr val="1E1E1E"/>
+                </a:solidFill>
+                <a:latin typeface="Microsoft YaHei"/>
+              </a:rPr>
+              <a:t>Ranking</a:t>
+            </a:r>
+          </a:p>
+        </p:txBody>
+      </p:sp>
+      <p:sp>
+        <p:nvSpPr>
+          <p:cNvPr id="24" name="TextBox 23"/>
+          <p:cNvSpPr txBox="1"/>
+          <p:nvPr/>
+        </p:nvSpPr>
+        <p:spPr>
+          <a:xfrm>
+            <a:off x="9720072" y="1911095"/>
+            <a:ext cx="2103120" cy="1005839"/>
+          </a:xfrm>
+          <a:prstGeom prst="rect">
+            <a:avLst/>
+          </a:prstGeom>
+          <a:noFill/>
+        </p:spPr>
+        <p:txBody>
+          <a:bodyPr wrap="square" anchor="t" lIns="0" rIns="0" tIns="0" bIns="0">
+            <a:spAutoFit/>
+          </a:bodyPr>
+          <a:lstStyle/>
+          <a:p>
+            <a:pPr algn="l">
+              <a:spcBef>
+                <a:spcPts val="0"/>
+              </a:spcBef>
+              <a:spcAft>
+                <a:spcPts val="0"/>
+              </a:spcAft>
+            </a:pPr>
+            <a:r>
+              <a:rPr sz="1150" b="0" i="0">
+                <a:solidFill>
+                  <a:srgbClr val="1E1E1E"/>
+                </a:solidFill>
+                <a:latin typeface="Microsoft YaHei"/>
+              </a:rPr>
+              <a:t>- String ranking_id
+- String user_id
+- DateTime created_at
+- List&lt;String&gt; order
+- Map&lt;String, Float&gt; dimension_scores
+- String comment</a:t>
+            </a:r>
+          </a:p>
+        </p:txBody>
+      </p:sp>
+      <p:sp>
+        <p:nvSpPr>
+          <p:cNvPr id="25" name="TextBox 24"/>
+          <p:cNvSpPr txBox="1"/>
+          <p:nvPr/>
+        </p:nvSpPr>
+        <p:spPr>
+          <a:xfrm>
+            <a:off x="9720072" y="3008375"/>
+            <a:ext cx="2103120" cy="676656"/>
+          </a:xfrm>
+          <a:prstGeom prst="rect">
+            <a:avLst/>
+          </a:prstGeom>
+          <a:noFill/>
+        </p:spPr>
+        <p:txBody>
+          <a:bodyPr wrap="square" anchor="t" lIns="0" rIns="0" tIns="0" bIns="0">
+            <a:spAutoFit/>
+          </a:bodyPr>
+          <a:lstStyle/>
+          <a:p>
+            <a:pPr algn="l">
+              <a:spcBef>
+                <a:spcPts val="0"/>
+              </a:spcBef>
+              <a:spcAft>
+                <a:spcPts val="0"/>
+              </a:spcAft>
+            </a:pPr>
+            <a:r>
+              <a:rPr sz="1150" b="0" i="0">
+                <a:solidFill>
+                  <a:srgbClr val="1E1E1E"/>
+                </a:solidFill>
+                <a:latin typeface="Microsoft YaHei"/>
+              </a:rPr>
+              <a:t>+ validate(): Boolean
++ toPreferencePair(): Pair</a:t>
+            </a:r>
+          </a:p>
+        </p:txBody>
+      </p:sp>
+      <p:cxnSp>
+        <p:nvCxnSpPr>
+          <p:cNvPr id="26" name="Connector 25"/>
+          <p:cNvCxnSpPr/>
+          <p:nvPr/>
+        </p:nvCxnSpPr>
+        <p:spPr>
+          <a:xfrm>
+            <a:off x="2432304" y="2560320"/>
+            <a:ext cx="813816" cy="0"/>
+          </a:xfrm>
+          <a:prstGeom prst="line">
+            <a:avLst/>
+          </a:prstGeom>
+          <a:ln w="12700">
+            <a:solidFill>
+              <a:srgbClr val="4A4A4A"/>
+            </a:solidFill>
+            <a:tailEnd type="arrow"/>
+          </a:ln>
+        </p:spPr>
+        <p:style>
+          <a:lnRef idx="2">
+            <a:schemeClr val="accent1"/>
+          </a:lnRef>
+          <a:fillRef idx="0">
+            <a:schemeClr val="accent1"/>
+          </a:fillRef>
+          <a:effectRef idx="1">
+            <a:schemeClr val="accent1"/>
+          </a:effectRef>
+          <a:fontRef idx="minor">
+            <a:schemeClr val="tx1"/>
+          </a:fontRef>
+        </p:style>
+      </p:cxnSp>
+      <p:sp>
+        <p:nvSpPr>
+          <p:cNvPr id="27" name="TextBox 26"/>
+          <p:cNvSpPr txBox="1"/>
+          <p:nvPr/>
+        </p:nvSpPr>
+        <p:spPr>
+          <a:xfrm>
+            <a:off x="2450592" y="2267712"/>
+            <a:ext cx="731520" cy="182880"/>
+          </a:xfrm>
+          <a:prstGeom prst="rect">
+            <a:avLst/>
+          </a:prstGeom>
+          <a:noFill/>
+        </p:spPr>
+        <p:txBody>
+          <a:bodyPr wrap="square" anchor="ctr" lIns="0" rIns="0" tIns="0" bIns="0">
+            <a:spAutoFit/>
+          </a:bodyPr>
+          <a:lstStyle/>
+          <a:p>
+            <a:pPr algn="ctr">
+              <a:spcBef>
+                <a:spcPts val="0"/>
+              </a:spcBef>
+              <a:spcAft>
+                <a:spcPts val="0"/>
+              </a:spcAft>
+            </a:pPr>
+            <a:r>
+              <a:rPr sz="1150" b="0" i="0">
+                <a:solidFill>
+                  <a:srgbClr val="1E1E1E"/>
+                </a:solidFill>
+                <a:latin typeface="Microsoft YaHei"/>
+              </a:rPr>
+              <a:t>发起分析</a:t>
+            </a:r>
+          </a:p>
+        </p:txBody>
+      </p:sp>
+      <p:sp>
+        <p:nvSpPr>
+          <p:cNvPr id="28" name="TextBox 27"/>
+          <p:cNvSpPr txBox="1"/>
+          <p:nvPr/>
+        </p:nvSpPr>
+        <p:spPr>
+          <a:xfrm>
+            <a:off x="2487168" y="2697480"/>
+            <a:ext cx="164592" cy="146304"/>
+          </a:xfrm>
+          <a:prstGeom prst="rect">
+            <a:avLst/>
+          </a:prstGeom>
+          <a:noFill/>
+        </p:spPr>
+        <p:txBody>
+          <a:bodyPr wrap="square" anchor="ctr" lIns="0" rIns="0" tIns="0" bIns="0">
+            <a:spAutoFit/>
+          </a:bodyPr>
+          <a:lstStyle/>
+          <a:p>
+            <a:pPr algn="ctr">
+              <a:spcBef>
+                <a:spcPts val="0"/>
+              </a:spcBef>
+              <a:spcAft>
+                <a:spcPts val="0"/>
+              </a:spcAft>
+            </a:pPr>
+            <a:r>
+              <a:rPr sz="950" b="0" i="0">
+                <a:solidFill>
+                  <a:srgbClr val="1E1E1E"/>
+                </a:solidFill>
+                <a:latin typeface="Microsoft YaHei"/>
+              </a:rPr>
+              <a:t>1</a:t>
+            </a:r>
+          </a:p>
+        </p:txBody>
+      </p:sp>
+      <p:sp>
+        <p:nvSpPr>
+          <p:cNvPr id="29" name="TextBox 28"/>
+          <p:cNvSpPr txBox="1"/>
+          <p:nvPr/>
+        </p:nvSpPr>
+        <p:spPr>
+          <a:xfrm>
+            <a:off x="2926080" y="2267712"/>
+            <a:ext cx="292608" cy="146304"/>
+          </a:xfrm>
+          <a:prstGeom prst="rect">
+            <a:avLst/>
+          </a:prstGeom>
+          <a:noFill/>
+        </p:spPr>
+        <p:txBody>
+          <a:bodyPr wrap="square" anchor="ctr" lIns="0" rIns="0" tIns="0" bIns="0">
+            <a:spAutoFit/>
+          </a:bodyPr>
+          <a:lstStyle/>
+          <a:p>
+            <a:pPr algn="ctr">
+              <a:spcBef>
+                <a:spcPts val="0"/>
+              </a:spcBef>
+              <a:spcAft>
+                <a:spcPts val="0"/>
+              </a:spcAft>
+            </a:pPr>
+            <a:r>
+              <a:rPr sz="950" b="0" i="0">
+                <a:solidFill>
+                  <a:srgbClr val="1E1E1E"/>
+                </a:solidFill>
+                <a:latin typeface="Microsoft YaHei"/>
+              </a:rPr>
+              <a:t>0..*</a:t>
+            </a:r>
+          </a:p>
+        </p:txBody>
+      </p:sp>
+      <p:cxnSp>
+        <p:nvCxnSpPr>
+          <p:cNvPr id="30" name="Connector 29"/>
+          <p:cNvCxnSpPr/>
+          <p:nvPr/>
+        </p:nvCxnSpPr>
+        <p:spPr>
+          <a:xfrm>
+            <a:off x="6007608" y="2816352"/>
+            <a:ext cx="594360" cy="0"/>
+          </a:xfrm>
+          <a:prstGeom prst="line">
+            <a:avLst/>
+          </a:prstGeom>
+          <a:ln w="12700">
+            <a:solidFill>
+              <a:srgbClr val="4A4A4A"/>
+            </a:solidFill>
+            <a:tailEnd type="arrow"/>
+          </a:ln>
+        </p:spPr>
+        <p:style>
+          <a:lnRef idx="2">
+            <a:schemeClr val="accent1"/>
+          </a:lnRef>
+          <a:fillRef idx="0">
+            <a:schemeClr val="accent1"/>
+          </a:fillRef>
+          <a:effectRef idx="1">
+            <a:schemeClr val="accent1"/>
+          </a:effectRef>
+          <a:fontRef idx="minor">
+            <a:schemeClr val="tx1"/>
+          </a:fontRef>
+        </p:style>
+      </p:cxnSp>
+      <p:sp>
+        <p:nvSpPr>
+          <p:cNvPr id="31" name="TextBox 30"/>
+          <p:cNvSpPr txBox="1"/>
+          <p:nvPr/>
+        </p:nvSpPr>
+        <p:spPr>
+          <a:xfrm>
+            <a:off x="6016752" y="2523744"/>
+            <a:ext cx="502920" cy="182880"/>
+          </a:xfrm>
+          <a:prstGeom prst="rect">
+            <a:avLst/>
+          </a:prstGeom>
+          <a:noFill/>
+        </p:spPr>
+        <p:txBody>
+          <a:bodyPr wrap="square" anchor="ctr" lIns="0" rIns="0" tIns="0" bIns="0">
+            <a:spAutoFit/>
+          </a:bodyPr>
+          <a:lstStyle/>
+          <a:p>
+            <a:pPr algn="ctr">
+              <a:spcBef>
+                <a:spcPts val="0"/>
+              </a:spcBef>
+              <a:spcAft>
+                <a:spcPts val="0"/>
+              </a:spcAft>
+            </a:pPr>
+            <a:r>
+              <a:rPr sz="1150" b="0" i="0">
+                <a:solidFill>
+                  <a:srgbClr val="1E1E1E"/>
+                </a:solidFill>
+                <a:latin typeface="Microsoft YaHei"/>
+              </a:rPr>
+              <a:t>生成</a:t>
+            </a:r>
+          </a:p>
+        </p:txBody>
+      </p:sp>
+      <p:sp>
+        <p:nvSpPr>
+          <p:cNvPr id="32" name="TextBox 31"/>
+          <p:cNvSpPr txBox="1"/>
+          <p:nvPr/>
+        </p:nvSpPr>
+        <p:spPr>
+          <a:xfrm>
+            <a:off x="5980176" y="2962656"/>
+            <a:ext cx="164592" cy="146304"/>
+          </a:xfrm>
+          <a:prstGeom prst="rect">
+            <a:avLst/>
+          </a:prstGeom>
+          <a:noFill/>
+        </p:spPr>
+        <p:txBody>
+          <a:bodyPr wrap="square" anchor="ctr" lIns="0" rIns="0" tIns="0" bIns="0">
+            <a:spAutoFit/>
+          </a:bodyPr>
+          <a:lstStyle/>
+          <a:p>
+            <a:pPr algn="ctr">
+              <a:spcBef>
+                <a:spcPts val="0"/>
+              </a:spcBef>
+              <a:spcAft>
+                <a:spcPts val="0"/>
+              </a:spcAft>
+            </a:pPr>
+            <a:r>
+              <a:rPr sz="950" b="0" i="0">
+                <a:solidFill>
+                  <a:srgbClr val="1E1E1E"/>
+                </a:solidFill>
+                <a:latin typeface="Microsoft YaHei"/>
+              </a:rPr>
+              <a:t>1</a:t>
+            </a:r>
+          </a:p>
+        </p:txBody>
+      </p:sp>
+      <p:sp>
+        <p:nvSpPr>
+          <p:cNvPr id="33" name="TextBox 32"/>
+          <p:cNvSpPr txBox="1"/>
+          <p:nvPr/>
+        </p:nvSpPr>
+        <p:spPr>
+          <a:xfrm>
+            <a:off x="6336792" y="2523744"/>
+            <a:ext cx="329184" cy="146304"/>
+          </a:xfrm>
+          <a:prstGeom prst="rect">
+            <a:avLst/>
+          </a:prstGeom>
+          <a:noFill/>
+        </p:spPr>
+        <p:txBody>
+          <a:bodyPr wrap="square" anchor="ctr" lIns="0" rIns="0" tIns="0" bIns="0">
+            <a:spAutoFit/>
+          </a:bodyPr>
+          <a:lstStyle/>
+          <a:p>
+            <a:pPr algn="ctr">
+              <a:spcBef>
+                <a:spcPts val="0"/>
+              </a:spcBef>
+              <a:spcAft>
+                <a:spcPts val="0"/>
+              </a:spcAft>
+            </a:pPr>
+            <a:r>
+              <a:rPr sz="950" b="0" i="0">
+                <a:solidFill>
+                  <a:srgbClr val="1E1E1E"/>
+                </a:solidFill>
+                <a:latin typeface="Microsoft YaHei"/>
+              </a:rPr>
+              <a:t>1..*</a:t>
+            </a:r>
+          </a:p>
+        </p:txBody>
+      </p:sp>
+      <p:cxnSp>
+        <p:nvCxnSpPr>
+          <p:cNvPr id="34" name="Connector 33"/>
+          <p:cNvCxnSpPr/>
+          <p:nvPr/>
+        </p:nvCxnSpPr>
+        <p:spPr>
+          <a:xfrm flipV="1">
+            <a:off x="6007608" y="1115568"/>
+            <a:ext cx="0" cy="877824"/>
+          </a:xfrm>
+          <a:prstGeom prst="line">
+            <a:avLst/>
+          </a:prstGeom>
+          <a:ln w="12700">
+            <a:solidFill>
+              <a:srgbClr val="4A4A4A"/>
+            </a:solidFill>
+          </a:ln>
+        </p:spPr>
+        <p:style>
+          <a:lnRef idx="2">
+            <a:schemeClr val="accent1"/>
+          </a:lnRef>
+          <a:fillRef idx="0">
+            <a:schemeClr val="accent1"/>
+          </a:fillRef>
+          <a:effectRef idx="1">
+            <a:schemeClr val="accent1"/>
+          </a:effectRef>
+          <a:fontRef idx="minor">
+            <a:schemeClr val="tx1"/>
+          </a:fontRef>
+        </p:style>
+      </p:cxnSp>
+      <p:cxnSp>
+        <p:nvCxnSpPr>
+          <p:cNvPr id="35" name="Connector 34"/>
+          <p:cNvCxnSpPr/>
+          <p:nvPr/>
+        </p:nvCxnSpPr>
+        <p:spPr>
+          <a:xfrm>
+            <a:off x="6007608" y="1115568"/>
+            <a:ext cx="3621024" cy="0"/>
+          </a:xfrm>
+          <a:prstGeom prst="line">
+            <a:avLst/>
+          </a:prstGeom>
+          <a:ln w="12700">
+            <a:solidFill>
+              <a:srgbClr val="4A4A4A"/>
+            </a:solidFill>
+          </a:ln>
+        </p:spPr>
+        <p:style>
+          <a:lnRef idx="2">
+            <a:schemeClr val="accent1"/>
+          </a:lnRef>
+          <a:fillRef idx="0">
+            <a:schemeClr val="accent1"/>
+          </a:fillRef>
+          <a:effectRef idx="1">
+            <a:schemeClr val="accent1"/>
+          </a:effectRef>
+          <a:fontRef idx="minor">
+            <a:schemeClr val="tx1"/>
+          </a:fontRef>
+        </p:style>
+      </p:cxnSp>
+      <p:cxnSp>
+        <p:nvCxnSpPr>
+          <p:cNvPr id="36" name="Connector 35"/>
+          <p:cNvCxnSpPr/>
+          <p:nvPr/>
+        </p:nvCxnSpPr>
+        <p:spPr>
+          <a:xfrm>
+            <a:off x="9628632" y="1115568"/>
+            <a:ext cx="0" cy="749808"/>
+          </a:xfrm>
+          <a:prstGeom prst="line">
+            <a:avLst/>
+          </a:prstGeom>
+          <a:ln w="12700">
+            <a:solidFill>
+              <a:srgbClr val="4A4A4A"/>
+            </a:solidFill>
+            <a:tailEnd type="arrow"/>
+          </a:ln>
+        </p:spPr>
+        <p:style>
+          <a:lnRef idx="2">
+            <a:schemeClr val="accent1"/>
+          </a:lnRef>
+          <a:fillRef idx="0">
+            <a:schemeClr val="accent1"/>
+          </a:fillRef>
+          <a:effectRef idx="1">
+            <a:schemeClr val="accent1"/>
+          </a:effectRef>
+          <a:fontRef idx="minor">
+            <a:schemeClr val="tx1"/>
+          </a:fontRef>
+        </p:style>
+      </p:cxnSp>
+      <p:sp>
+        <p:nvSpPr>
+          <p:cNvPr id="37" name="TextBox 36"/>
+          <p:cNvSpPr txBox="1"/>
+          <p:nvPr/>
+        </p:nvSpPr>
+        <p:spPr>
+          <a:xfrm>
+            <a:off x="7406640" y="859536"/>
+            <a:ext cx="749808" cy="182880"/>
+          </a:xfrm>
+          <a:prstGeom prst="rect">
+            <a:avLst/>
+          </a:prstGeom>
+          <a:noFill/>
+        </p:spPr>
+        <p:txBody>
+          <a:bodyPr wrap="square" anchor="ctr" lIns="0" rIns="0" tIns="0" bIns="0">
+            <a:spAutoFit/>
+          </a:bodyPr>
+          <a:lstStyle/>
+          <a:p>
+            <a:pPr algn="ctr">
+              <a:spcBef>
+                <a:spcPts val="0"/>
+              </a:spcBef>
+              <a:spcAft>
+                <a:spcPts val="0"/>
+              </a:spcAft>
+            </a:pPr>
+            <a:r>
+              <a:rPr sz="1150" b="0" i="0">
+                <a:solidFill>
+                  <a:srgbClr val="1E1E1E"/>
+                </a:solidFill>
+                <a:latin typeface="Microsoft YaHei"/>
+              </a:rPr>
+              <a:t>收集评价</a:t>
+            </a:r>
+          </a:p>
+        </p:txBody>
+      </p:sp>
+      <p:sp>
+        <p:nvSpPr>
+          <p:cNvPr id="38" name="TextBox 37"/>
+          <p:cNvSpPr txBox="1"/>
+          <p:nvPr/>
+        </p:nvSpPr>
+        <p:spPr>
+          <a:xfrm>
+            <a:off x="6053328" y="1755648"/>
+            <a:ext cx="164592" cy="146304"/>
+          </a:xfrm>
+          <a:prstGeom prst="rect">
+            <a:avLst/>
+          </a:prstGeom>
+          <a:noFill/>
+        </p:spPr>
+        <p:txBody>
+          <a:bodyPr wrap="square" anchor="ctr" lIns="0" rIns="0" tIns="0" bIns="0">
+            <a:spAutoFit/>
+          </a:bodyPr>
+          <a:lstStyle/>
+          <a:p>
+            <a:pPr algn="ctr">
+              <a:spcBef>
+                <a:spcPts val="0"/>
+              </a:spcBef>
+              <a:spcAft>
+                <a:spcPts val="0"/>
+              </a:spcAft>
+            </a:pPr>
+            <a:r>
+              <a:rPr sz="950" b="0" i="0">
+                <a:solidFill>
+                  <a:srgbClr val="1E1E1E"/>
+                </a:solidFill>
+                <a:latin typeface="Microsoft YaHei"/>
+              </a:rPr>
+              <a:t>1</a:t>
+            </a:r>
+          </a:p>
+        </p:txBody>
+      </p:sp>
+      <p:sp>
+        <p:nvSpPr>
+          <p:cNvPr id="39" name="TextBox 38"/>
+          <p:cNvSpPr txBox="1"/>
+          <p:nvPr/>
+        </p:nvSpPr>
+        <p:spPr>
+          <a:xfrm>
+            <a:off x="9345168" y="859536"/>
+            <a:ext cx="292608" cy="146304"/>
+          </a:xfrm>
+          <a:prstGeom prst="rect">
+            <a:avLst/>
+          </a:prstGeom>
+          <a:noFill/>
+        </p:spPr>
+        <p:txBody>
+          <a:bodyPr wrap="square" anchor="ctr" lIns="0" rIns="0" tIns="0" bIns="0">
+            <a:spAutoFit/>
+          </a:bodyPr>
+          <a:lstStyle/>
+          <a:p>
+            <a:pPr algn="ctr">
+              <a:spcBef>
+                <a:spcPts val="0"/>
+              </a:spcBef>
+              <a:spcAft>
+                <a:spcPts val="0"/>
+              </a:spcAft>
+            </a:pPr>
+            <a:r>
+              <a:rPr sz="950" b="0" i="0">
+                <a:solidFill>
+                  <a:srgbClr val="1E1E1E"/>
+                </a:solidFill>
+                <a:latin typeface="Microsoft YaHei"/>
+              </a:rPr>
+              <a:t>0..*</a:t>
+            </a:r>
+          </a:p>
+        </p:txBody>
+      </p:sp>
+      <p:cxnSp>
+        <p:nvCxnSpPr>
+          <p:cNvPr id="40" name="Connector 39"/>
+          <p:cNvCxnSpPr/>
+          <p:nvPr/>
+        </p:nvCxnSpPr>
+        <p:spPr>
+          <a:xfrm flipH="1">
+            <a:off x="8778240" y="3273552"/>
+            <a:ext cx="850392" cy="0"/>
+          </a:xfrm>
+          <a:prstGeom prst="line">
+            <a:avLst/>
+          </a:prstGeom>
+          <a:ln w="12700">
+            <a:solidFill>
+              <a:srgbClr val="4A4A4A"/>
+            </a:solidFill>
+            <a:tailEnd type="arrow"/>
+          </a:ln>
+        </p:spPr>
+        <p:style>
+          <a:lnRef idx="2">
+            <a:schemeClr val="accent1"/>
+          </a:lnRef>
+          <a:fillRef idx="0">
+            <a:schemeClr val="accent1"/>
+          </a:fillRef>
+          <a:effectRef idx="1">
+            <a:schemeClr val="accent1"/>
+          </a:effectRef>
+          <a:fontRef idx="minor">
+            <a:schemeClr val="tx1"/>
+          </a:fontRef>
+        </p:style>
+      </p:cxnSp>
+      <p:sp>
+        <p:nvSpPr>
+          <p:cNvPr id="41" name="TextBox 40"/>
+          <p:cNvSpPr txBox="1"/>
+          <p:nvPr/>
+        </p:nvSpPr>
+        <p:spPr>
+          <a:xfrm>
+            <a:off x="8961120" y="2980944"/>
+            <a:ext cx="749808" cy="182880"/>
+          </a:xfrm>
+          <a:prstGeom prst="rect">
+            <a:avLst/>
+          </a:prstGeom>
+          <a:noFill/>
+        </p:spPr>
+        <p:txBody>
+          <a:bodyPr wrap="square" anchor="ctr" lIns="0" rIns="0" tIns="0" bIns="0">
+            <a:spAutoFit/>
+          </a:bodyPr>
+          <a:lstStyle/>
+          <a:p>
+            <a:pPr algn="ctr">
+              <a:spcBef>
+                <a:spcPts val="0"/>
+              </a:spcBef>
+              <a:spcAft>
+                <a:spcPts val="0"/>
+              </a:spcAft>
+            </a:pPr>
+            <a:r>
+              <a:rPr sz="1150" b="0" i="0">
+                <a:solidFill>
+                  <a:srgbClr val="1E1E1E"/>
+                </a:solidFill>
+                <a:latin typeface="Microsoft YaHei"/>
+              </a:rPr>
+              <a:t>排序对象</a:t>
+            </a:r>
+          </a:p>
+        </p:txBody>
+      </p:sp>
+      <p:sp>
+        <p:nvSpPr>
+          <p:cNvPr id="42" name="TextBox 41"/>
+          <p:cNvSpPr txBox="1"/>
+          <p:nvPr/>
+        </p:nvSpPr>
+        <p:spPr>
+          <a:xfrm>
+            <a:off x="8613648" y="3419856"/>
+            <a:ext cx="310896" cy="146304"/>
+          </a:xfrm>
+          <a:prstGeom prst="rect">
+            <a:avLst/>
+          </a:prstGeom>
+          <a:noFill/>
+        </p:spPr>
+        <p:txBody>
+          <a:bodyPr wrap="square" anchor="ctr" lIns="0" rIns="0" tIns="0" bIns="0">
+            <a:spAutoFit/>
+          </a:bodyPr>
+          <a:lstStyle/>
+          <a:p>
+            <a:pPr algn="ctr">
+              <a:spcBef>
+                <a:spcPts val="0"/>
+              </a:spcBef>
+              <a:spcAft>
+                <a:spcPts val="0"/>
+              </a:spcAft>
+            </a:pPr>
+            <a:r>
+              <a:rPr sz="950" b="0" i="0">
+                <a:solidFill>
+                  <a:srgbClr val="1E1E1E"/>
+                </a:solidFill>
+                <a:latin typeface="Microsoft YaHei"/>
+              </a:rPr>
+              <a:t>1..*</a:t>
+            </a:r>
+          </a:p>
+        </p:txBody>
+      </p:sp>
+      <p:sp>
+        <p:nvSpPr>
+          <p:cNvPr id="43" name="TextBox 42"/>
+          <p:cNvSpPr txBox="1"/>
+          <p:nvPr/>
+        </p:nvSpPr>
+        <p:spPr>
+          <a:xfrm>
+            <a:off x="9171432" y="3419856"/>
+            <a:ext cx="274320" cy="146304"/>
+          </a:xfrm>
+          <a:prstGeom prst="rect">
+            <a:avLst/>
+          </a:prstGeom>
+          <a:noFill/>
+        </p:spPr>
+        <p:txBody>
+          <a:bodyPr wrap="square" anchor="ctr" lIns="0" rIns="0" tIns="0" bIns="0">
+            <a:spAutoFit/>
+          </a:bodyPr>
+          <a:lstStyle/>
+          <a:p>
+            <a:pPr algn="ctr">
+              <a:spcBef>
+                <a:spcPts val="0"/>
+              </a:spcBef>
+              <a:spcAft>
+                <a:spcPts val="0"/>
+              </a:spcAft>
+            </a:pPr>
+            <a:r>
+              <a:rPr sz="950" b="0" i="0">
+                <a:solidFill>
+                  <a:srgbClr val="1E1E1E"/>
+                </a:solidFill>
+                <a:latin typeface="Microsoft YaHei"/>
+              </a:rPr>
+              <a:t>0..*</a:t>
+            </a:r>
+          </a:p>
+        </p:txBody>
+      </p:sp>
     </p:spTree>
   </p:cSld>
   <p:clrMapOvr>
